--- a/images/funding/fls.pptx
+++ b/images/funding/fls.pptx
@@ -3361,8 +3361,8 @@
         </p:nvSpPr>
         <p:spPr>
           <a:xfrm>
-            <a:off x="1490437" y="2555142"/>
-            <a:ext cx="4376070" cy="369332"/>
+            <a:off x="1937036" y="3328936"/>
+            <a:ext cx="2038635" cy="646331"/>
           </a:xfrm>
           <a:prstGeom prst="rect">
             <a:avLst/>
@@ -3375,13 +3375,23 @@
           </a:bodyPr>
           <a:lstStyle/>
           <a:p>
+            <a:pPr algn="ctr"/>
             <a:r>
               <a:rPr lang="en-FI" dirty="0">
-                <a:latin typeface="Cambria" panose="02040503050406030204" pitchFamily="18" charset="0"/>
                 <a:ea typeface="Helvetica Neue" panose="02000503000000020004" pitchFamily="2" charset="0"/>
-                <a:cs typeface="Helvetica Neue" panose="02000503000000020004" pitchFamily="2" charset="0"/>
+                <a:cs typeface="Gautami" panose="020B0502040204020203" pitchFamily="34" charset="0"/>
               </a:rPr>
-              <a:t>FINSKA		    LÄKARESÄLLSKAPET</a:t>
+              <a:t>FINSKA</a:t>
+            </a:r>
+          </a:p>
+          <a:p>
+            <a:pPr algn="ctr"/>
+            <a:r>
+              <a:rPr lang="en-FI" dirty="0">
+                <a:ea typeface="Helvetica Neue" panose="02000503000000020004" pitchFamily="2" charset="0"/>
+                <a:cs typeface="Gautami" panose="020B0502040204020203" pitchFamily="34" charset="0"/>
+              </a:rPr>
+              <a:t>LÄKARESÄLLSKAPET</a:t>
             </a:r>
           </a:p>
         </p:txBody>
@@ -3395,15 +3405,17 @@
               </a:ext>
             </a:extLst>
           </p:cNvPr>
-          <p:cNvGrpSpPr/>
+          <p:cNvGrpSpPr>
+            <a:grpSpLocks noChangeAspect="1"/>
+          </p:cNvGrpSpPr>
           <p:nvPr/>
         </p:nvGrpSpPr>
         <p:grpSpPr>
           <a:xfrm>
-            <a:off x="2372497" y="2162432"/>
-            <a:ext cx="1155357" cy="1154752"/>
-            <a:chOff x="2372497" y="2162432"/>
-            <a:chExt cx="1155357" cy="1154752"/>
+            <a:off x="2020808" y="1633755"/>
+            <a:ext cx="1791313" cy="1781682"/>
+            <a:chOff x="2378674" y="2174184"/>
+            <a:chExt cx="1149179" cy="1143000"/>
           </a:xfrm>
         </p:grpSpPr>
         <p:pic>
@@ -3447,16 +3459,14 @@
           </p:blipFill>
           <p:spPr>
             <a:xfrm>
-              <a:off x="2384854" y="2174184"/>
+              <a:off x="2384853" y="2174184"/>
               <a:ext cx="1143000" cy="1143000"/>
             </a:xfrm>
             <a:prstGeom prst="rect">
               <a:avLst/>
             </a:prstGeom>
             <a:ln w="3175">
-              <a:solidFill>
-                <a:schemeClr val="tx1"/>
-              </a:solidFill>
+              <a:noFill/>
             </a:ln>
           </p:spPr>
         </p:pic>
@@ -3474,7 +3484,7 @@
           </p:nvSpPr>
           <p:spPr>
             <a:xfrm>
-              <a:off x="2372497" y="2162432"/>
+              <a:off x="2378674" y="2174184"/>
               <a:ext cx="1149179" cy="1143000"/>
             </a:xfrm>
             <a:prstGeom prst="rect">
